--- a/src/ppt-super/assets/tpl-06-radial-hub/template.pptx
+++ b/src/ppt-super/assets/tpl-06-radial-hub/template.pptx
@@ -3136,7 +3136,14 @@
           <a:bodyPr rtlCol="0" anchor="ctr"/>
           <a:lstStyle/>
           <a:p>
-            <a:pPr algn="ctr"/>
+            <a:pPr algn="ctr">
+              <a:spcBef>
+                <a:spcPts val="0"/>
+              </a:spcBef>
+              <a:spcAft>
+                <a:spcPts val="0"/>
+              </a:spcAft>
+            </a:pPr>
           </a:p>
         </p:txBody>
       </p:sp>
@@ -3166,14 +3173,21 @@
               <a:lnSpc>
                 <a:spcPct val="112000"/>
               </a:lnSpc>
+              <a:spcBef>
+                <a:spcPts val="0"/>
+              </a:spcBef>
+              <a:spcAft>
+                <a:spcPts val="0"/>
+              </a:spcAft>
             </a:pPr>
             <a:r>
-              <a:rPr sz="1400" b="1" i="0">
+              <a:rPr sz="1400" b="1" i="0" lang="zh-CN" altLang="zh-CN">
                 <a:solidFill>
                   <a:srgbClr val="FFFFFF"/>
                 </a:solidFill>
                 <a:latin typeface="Microsoft YaHei"/>
                 <a:ea typeface="Microsoft YaHei"/>
+                <a:cs typeface="Microsoft YaHei"/>
               </a:rPr>
               <a:t>盘古大模型</a:t>
             </a:r>
@@ -3206,14 +3220,21 @@
               <a:lnSpc>
                 <a:spcPct val="112000"/>
               </a:lnSpc>
+              <a:spcBef>
+                <a:spcPts val="0"/>
+              </a:spcBef>
+              <a:spcAft>
+                <a:spcPts val="0"/>
+              </a:spcAft>
             </a:pPr>
             <a:r>
-              <a:rPr sz="2200" b="1" i="0">
+              <a:rPr sz="2200" b="1" i="0" lang="zh-CN" altLang="zh-CN">
                 <a:solidFill>
                   <a:srgbClr val="B90A0A"/>
                 </a:solidFill>
                 <a:latin typeface="Microsoft YaHei"/>
                 <a:ea typeface="Microsoft YaHei"/>
+                <a:cs typeface="Microsoft YaHei"/>
               </a:rPr>
               <a:t>盘古大模型: 1 个 L0 基座辐射 6 大行业场景, 定制成本下降 90%</a:t>
             </a:r>
@@ -3521,7 +3542,14 @@
           <a:bodyPr rtlCol="0" anchor="ctr"/>
           <a:lstStyle/>
           <a:p>
-            <a:pPr algn="ctr"/>
+            <a:pPr algn="ctr">
+              <a:spcBef>
+                <a:spcPts val="0"/>
+              </a:spcBef>
+              <a:spcAft>
+                <a:spcPts val="0"/>
+              </a:spcAft>
+            </a:pPr>
           </a:p>
         </p:txBody>
       </p:sp>
@@ -3565,7 +3593,14 @@
           <a:bodyPr rtlCol="0" anchor="ctr"/>
           <a:lstStyle/>
           <a:p>
-            <a:pPr algn="ctr"/>
+            <a:pPr algn="ctr">
+              <a:spcBef>
+                <a:spcPts val="0"/>
+              </a:spcBef>
+              <a:spcAft>
+                <a:spcPts val="0"/>
+              </a:spcAft>
+            </a:pPr>
           </a:p>
         </p:txBody>
       </p:sp>
@@ -3611,7 +3646,14 @@
           <a:bodyPr rtlCol="0" anchor="ctr"/>
           <a:lstStyle/>
           <a:p>
-            <a:pPr algn="ctr"/>
+            <a:pPr algn="ctr">
+              <a:spcBef>
+                <a:spcPts val="0"/>
+              </a:spcBef>
+              <a:spcAft>
+                <a:spcPts val="0"/>
+              </a:spcAft>
+            </a:pPr>
           </a:p>
         </p:txBody>
       </p:sp>
@@ -3657,7 +3699,14 @@
           <a:bodyPr rtlCol="0" anchor="ctr"/>
           <a:lstStyle/>
           <a:p>
-            <a:pPr algn="ctr"/>
+            <a:pPr algn="ctr">
+              <a:spcBef>
+                <a:spcPts val="0"/>
+              </a:spcBef>
+              <a:spcAft>
+                <a:spcPts val="0"/>
+              </a:spcAft>
+            </a:pPr>
           </a:p>
         </p:txBody>
       </p:sp>
@@ -4119,14 +4168,21 @@
               <a:lnSpc>
                 <a:spcPct val="112000"/>
               </a:lnSpc>
+              <a:spcBef>
+                <a:spcPts val="0"/>
+              </a:spcBef>
+              <a:spcAft>
+                <a:spcPts val="0"/>
+              </a:spcAft>
             </a:pPr>
             <a:r>
-              <a:rPr sz="1800" b="1" i="0">
+              <a:rPr sz="1800" b="1" i="0" lang="zh-CN" altLang="zh-CN">
                 <a:solidFill>
                   <a:srgbClr val="FFFFFF"/>
                 </a:solidFill>
                 <a:latin typeface="Microsoft YaHei"/>
                 <a:ea typeface="Microsoft YaHei"/>
+                <a:cs typeface="Microsoft YaHei"/>
               </a:rPr>
               <a:t>盘古大模型 5.0</a:t>
             </a:r>
@@ -4159,14 +4215,21 @@
               <a:lnSpc>
                 <a:spcPct val="112000"/>
               </a:lnSpc>
+              <a:spcBef>
+                <a:spcPts val="0"/>
+              </a:spcBef>
+              <a:spcAft>
+                <a:spcPts val="0"/>
+              </a:spcAft>
             </a:pPr>
             <a:r>
-              <a:rPr sz="1050" b="0" i="0">
+              <a:rPr sz="1050" b="0" i="0" lang="zh-CN" altLang="zh-CN">
                 <a:solidFill>
                   <a:srgbClr val="FFFFFF"/>
                 </a:solidFill>
                 <a:latin typeface="Microsoft YaHei"/>
                 <a:ea typeface="Microsoft YaHei"/>
+                <a:cs typeface="Microsoft YaHei"/>
               </a:rPr>
               <a:t>L0 基座+L1 行业+L2 场景</a:t>
             </a:r>
@@ -4176,14 +4239,21 @@
               <a:lnSpc>
                 <a:spcPct val="112000"/>
               </a:lnSpc>
+              <a:spcBef>
+                <a:spcPts val="0"/>
+              </a:spcBef>
+              <a:spcAft>
+                <a:spcPts val="0"/>
+              </a:spcAft>
             </a:pPr>
             <a:r>
-              <a:rPr sz="1050" b="0" i="0">
+              <a:rPr sz="1050" b="0" i="0" lang="zh-CN" altLang="zh-CN">
                 <a:solidFill>
                   <a:srgbClr val="FFFFFF"/>
                 </a:solidFill>
                 <a:latin typeface="Microsoft YaHei"/>
                 <a:ea typeface="Microsoft YaHei"/>
+                <a:cs typeface="Microsoft YaHei"/>
               </a:rPr>
               <a:t>三层解耦架构</a:t>
             </a:r>
@@ -4232,7 +4302,14 @@
           <a:bodyPr rtlCol="0" anchor="ctr"/>
           <a:lstStyle/>
           <a:p>
-            <a:pPr algn="ctr"/>
+            <a:pPr algn="ctr">
+              <a:spcBef>
+                <a:spcPts val="0"/>
+              </a:spcBef>
+              <a:spcAft>
+                <a:spcPts val="0"/>
+              </a:spcAft>
+            </a:pPr>
           </a:p>
         </p:txBody>
       </p:sp>
@@ -4244,8 +4321,8 @@
         </p:nvSpPr>
         <p:spPr>
           <a:xfrm>
-            <a:off x="4114800" y="1168400"/>
-            <a:ext cx="279400" cy="279400"/>
+            <a:off x="4040187" y="1075817"/>
+            <a:ext cx="428625" cy="464566"/>
           </a:xfrm>
           <a:prstGeom prst="rect">
             <a:avLst/>
@@ -4262,14 +4339,21 @@
               <a:lnSpc>
                 <a:spcPct val="112000"/>
               </a:lnSpc>
+              <a:spcBef>
+                <a:spcPts val="0"/>
+              </a:spcBef>
+              <a:spcAft>
+                <a:spcPts val="0"/>
+              </a:spcAft>
             </a:pPr>
             <a:r>
-              <a:rPr sz="2800" b="1" i="0">
+              <a:rPr sz="2800" b="1" i="0" lang="zh-CN" altLang="zh-CN">
                 <a:solidFill>
                   <a:srgbClr val="1F4E79"/>
                 </a:solidFill>
                 <a:latin typeface="Microsoft YaHei"/>
                 <a:ea typeface="Microsoft YaHei"/>
+                <a:cs typeface="Microsoft YaHei"/>
               </a:rPr>
               <a:t>⚙</a:t>
             </a:r>
@@ -4284,8 +4368,8 @@
         </p:nvSpPr>
         <p:spPr>
           <a:xfrm>
-            <a:off x="3619500" y="1517650"/>
-            <a:ext cx="1270000" cy="190500"/>
+            <a:off x="3619500" y="1498917"/>
+            <a:ext cx="1270000" cy="227965"/>
           </a:xfrm>
           <a:prstGeom prst="rect">
             <a:avLst/>
@@ -4302,14 +4386,21 @@
               <a:lnSpc>
                 <a:spcPct val="112000"/>
               </a:lnSpc>
+              <a:spcBef>
+                <a:spcPts val="0"/>
+              </a:spcBef>
+              <a:spcAft>
+                <a:spcPts val="0"/>
+              </a:spcAft>
             </a:pPr>
             <a:r>
-              <a:rPr sz="1300" b="1" i="0">
+              <a:rPr sz="1300" b="1" i="0" lang="zh-CN" altLang="zh-CN">
                 <a:solidFill>
                   <a:srgbClr val="1F4E79"/>
                 </a:solidFill>
                 <a:latin typeface="Microsoft YaHei"/>
                 <a:ea typeface="Microsoft YaHei"/>
+                <a:cs typeface="Microsoft YaHei"/>
               </a:rPr>
               <a:t>智能矿山</a:t>
             </a:r>
@@ -4342,14 +4433,21 @@
               <a:lnSpc>
                 <a:spcPct val="112000"/>
               </a:lnSpc>
+              <a:spcBef>
+                <a:spcPts val="0"/>
+              </a:spcBef>
+              <a:spcAft>
+                <a:spcPts val="0"/>
+              </a:spcAft>
             </a:pPr>
             <a:r>
-              <a:rPr sz="950" b="0" i="0">
+              <a:rPr sz="950" b="0" i="0" lang="zh-CN" altLang="zh-CN">
                 <a:solidFill>
                   <a:srgbClr val="262626"/>
                 </a:solidFill>
                 <a:latin typeface="Microsoft YaHei"/>
                 <a:ea typeface="Microsoft YaHei"/>
+                <a:cs typeface="Microsoft YaHei"/>
               </a:rPr>
               <a:t>掘进-主运-洗选全流程 AI 化, 井下作业人员减少 30%</a:t>
             </a:r>
@@ -4398,7 +4496,14 @@
           <a:bodyPr rtlCol="0" anchor="ctr"/>
           <a:lstStyle/>
           <a:p>
-            <a:pPr algn="ctr"/>
+            <a:pPr algn="ctr">
+              <a:spcBef>
+                <a:spcPts val="0"/>
+              </a:spcBef>
+              <a:spcAft>
+                <a:spcPts val="0"/>
+              </a:spcAft>
+            </a:pPr>
           </a:p>
         </p:txBody>
       </p:sp>
@@ -4410,8 +4515,8 @@
         </p:nvSpPr>
         <p:spPr>
           <a:xfrm>
-            <a:off x="7797800" y="1168400"/>
-            <a:ext cx="279400" cy="279400"/>
+            <a:off x="7718425" y="1075817"/>
+            <a:ext cx="438150" cy="464566"/>
           </a:xfrm>
           <a:prstGeom prst="rect">
             <a:avLst/>
@@ -4428,14 +4533,21 @@
               <a:lnSpc>
                 <a:spcPct val="112000"/>
               </a:lnSpc>
+              <a:spcBef>
+                <a:spcPts val="0"/>
+              </a:spcBef>
+              <a:spcAft>
+                <a:spcPts val="0"/>
+              </a:spcAft>
             </a:pPr>
             <a:r>
-              <a:rPr sz="2800" b="1" i="0">
+              <a:rPr sz="2800" b="1" i="0" lang="zh-CN" altLang="zh-CN">
                 <a:solidFill>
                   <a:srgbClr val="1F4E79"/>
                 </a:solidFill>
                 <a:latin typeface="Microsoft YaHei"/>
                 <a:ea typeface="Microsoft YaHei"/>
+                <a:cs typeface="Microsoft YaHei"/>
               </a:rPr>
               <a:t>☁</a:t>
             </a:r>
@@ -4450,8 +4562,8 @@
         </p:nvSpPr>
         <p:spPr>
           <a:xfrm>
-            <a:off x="7302500" y="1517650"/>
-            <a:ext cx="1270000" cy="190500"/>
+            <a:off x="7302500" y="1498917"/>
+            <a:ext cx="1270000" cy="227965"/>
           </a:xfrm>
           <a:prstGeom prst="rect">
             <a:avLst/>
@@ -4468,14 +4580,21 @@
               <a:lnSpc>
                 <a:spcPct val="112000"/>
               </a:lnSpc>
+              <a:spcBef>
+                <a:spcPts val="0"/>
+              </a:spcBef>
+              <a:spcAft>
+                <a:spcPts val="0"/>
+              </a:spcAft>
             </a:pPr>
             <a:r>
-              <a:rPr sz="1300" b="1" i="0">
+              <a:rPr sz="1300" b="1" i="0" lang="zh-CN" altLang="zh-CN">
                 <a:solidFill>
                   <a:srgbClr val="1F4E79"/>
                 </a:solidFill>
                 <a:latin typeface="Microsoft YaHei"/>
                 <a:ea typeface="Microsoft YaHei"/>
+                <a:cs typeface="Microsoft YaHei"/>
               </a:rPr>
               <a:t>气象预报</a:t>
             </a:r>
@@ -4508,14 +4627,21 @@
               <a:lnSpc>
                 <a:spcPct val="112000"/>
               </a:lnSpc>
+              <a:spcBef>
+                <a:spcPts val="0"/>
+              </a:spcBef>
+              <a:spcAft>
+                <a:spcPts val="0"/>
+              </a:spcAft>
             </a:pPr>
             <a:r>
-              <a:rPr sz="950" b="0" i="0">
+              <a:rPr sz="950" b="0" i="0" lang="zh-CN" altLang="zh-CN">
                 <a:solidFill>
                   <a:srgbClr val="262626"/>
                 </a:solidFill>
                 <a:latin typeface="Microsoft YaHei"/>
                 <a:ea typeface="Microsoft YaHei"/>
+                <a:cs typeface="Microsoft YaHei"/>
               </a:rPr>
               <a:t>1 小时级临近预报, 台风路径预测精度超传统数值模式</a:t>
             </a:r>
@@ -4564,7 +4690,14 @@
           <a:bodyPr rtlCol="0" anchor="ctr"/>
           <a:lstStyle/>
           <a:p>
-            <a:pPr algn="ctr"/>
+            <a:pPr algn="ctr">
+              <a:spcBef>
+                <a:spcPts val="0"/>
+              </a:spcBef>
+              <a:spcAft>
+                <a:spcPts val="0"/>
+              </a:spcAft>
+            </a:pPr>
           </a:p>
         </p:txBody>
       </p:sp>
@@ -4608,7 +4741,14 @@
           <a:bodyPr rtlCol="0" anchor="ctr"/>
           <a:lstStyle/>
           <a:p>
-            <a:pPr algn="ctr"/>
+            <a:pPr algn="ctr">
+              <a:spcBef>
+                <a:spcPts val="0"/>
+              </a:spcBef>
+              <a:spcAft>
+                <a:spcPts val="0"/>
+              </a:spcAft>
+            </a:pPr>
           </a:p>
         </p:txBody>
       </p:sp>
@@ -4652,7 +4792,14 @@
           <a:bodyPr rtlCol="0" anchor="ctr"/>
           <a:lstStyle/>
           <a:p>
-            <a:pPr algn="ctr"/>
+            <a:pPr algn="ctr">
+              <a:spcBef>
+                <a:spcPts val="0"/>
+              </a:spcBef>
+              <a:spcAft>
+                <a:spcPts val="0"/>
+              </a:spcAft>
+            </a:pPr>
           </a:p>
         </p:txBody>
       </p:sp>
@@ -4696,7 +4843,14 @@
           <a:bodyPr rtlCol="0" anchor="ctr"/>
           <a:lstStyle/>
           <a:p>
-            <a:pPr algn="ctr"/>
+            <a:pPr algn="ctr">
+              <a:spcBef>
+                <a:spcPts val="0"/>
+              </a:spcBef>
+              <a:spcAft>
+                <a:spcPts val="0"/>
+              </a:spcAft>
+            </a:pPr>
           </a:p>
         </p:txBody>
       </p:sp>
@@ -4708,8 +4862,8 @@
         </p:nvSpPr>
         <p:spPr>
           <a:xfrm>
-            <a:off x="9144000" y="3003550"/>
-            <a:ext cx="1270000" cy="190500"/>
+            <a:off x="9144000" y="2984817"/>
+            <a:ext cx="1270000" cy="227965"/>
           </a:xfrm>
           <a:prstGeom prst="rect">
             <a:avLst/>
@@ -4726,14 +4880,21 @@
               <a:lnSpc>
                 <a:spcPct val="112000"/>
               </a:lnSpc>
+              <a:spcBef>
+                <a:spcPts val="0"/>
+              </a:spcBef>
+              <a:spcAft>
+                <a:spcPts val="0"/>
+              </a:spcAft>
             </a:pPr>
             <a:r>
-              <a:rPr sz="1300" b="1" i="0">
+              <a:rPr sz="1300" b="1" i="0" lang="zh-CN" altLang="zh-CN">
                 <a:solidFill>
                   <a:srgbClr val="1F4E79"/>
                 </a:solidFill>
                 <a:latin typeface="Microsoft YaHei"/>
                 <a:ea typeface="Microsoft YaHei"/>
+                <a:cs typeface="Microsoft YaHei"/>
               </a:rPr>
               <a:t>药物研发</a:t>
             </a:r>
@@ -4766,14 +4927,21 @@
               <a:lnSpc>
                 <a:spcPct val="112000"/>
               </a:lnSpc>
+              <a:spcBef>
+                <a:spcPts val="0"/>
+              </a:spcBef>
+              <a:spcAft>
+                <a:spcPts val="0"/>
+              </a:spcAft>
             </a:pPr>
             <a:r>
-              <a:rPr sz="950" b="0" i="0">
+              <a:rPr sz="950" b="0" i="0" lang="zh-CN" altLang="zh-CN">
                 <a:solidFill>
                   <a:srgbClr val="262626"/>
                 </a:solidFill>
                 <a:latin typeface="Microsoft YaHei"/>
                 <a:ea typeface="Microsoft YaHei"/>
+                <a:cs typeface="Microsoft YaHei"/>
               </a:rPr>
               <a:t>先导药物筛选周期由数月缩短至 1 周, 成本降 70%</a:t>
             </a:r>
@@ -4822,7 +4990,14 @@
           <a:bodyPr rtlCol="0" anchor="ctr"/>
           <a:lstStyle/>
           <a:p>
-            <a:pPr algn="ctr"/>
+            <a:pPr algn="ctr">
+              <a:spcBef>
+                <a:spcPts val="0"/>
+              </a:spcBef>
+              <a:spcAft>
+                <a:spcPts val="0"/>
+              </a:spcAft>
+            </a:pPr>
           </a:p>
         </p:txBody>
       </p:sp>
@@ -4868,7 +5043,14 @@
           <a:bodyPr rtlCol="0" anchor="ctr"/>
           <a:lstStyle/>
           <a:p>
-            <a:pPr algn="ctr"/>
+            <a:pPr algn="ctr">
+              <a:spcBef>
+                <a:spcPts val="0"/>
+              </a:spcBef>
+              <a:spcAft>
+                <a:spcPts val="0"/>
+              </a:spcAft>
+            </a:pPr>
           </a:p>
         </p:txBody>
       </p:sp>
@@ -4898,14 +5080,21 @@
               <a:lnSpc>
                 <a:spcPct val="112000"/>
               </a:lnSpc>
+              <a:spcBef>
+                <a:spcPts val="0"/>
+              </a:spcBef>
+              <a:spcAft>
+                <a:spcPts val="0"/>
+              </a:spcAft>
             </a:pPr>
             <a:r>
-              <a:rPr sz="1700" b="1" i="0">
+              <a:rPr sz="1700" b="1" i="0" lang="zh-CN" altLang="zh-CN">
                 <a:solidFill>
                   <a:srgbClr val="1F4E79"/>
                 </a:solidFill>
                 <a:latin typeface="Microsoft YaHei"/>
                 <a:ea typeface="Microsoft YaHei"/>
+                <a:cs typeface="Microsoft YaHei"/>
               </a:rPr>
               <a:t>✓</a:t>
             </a:r>
@@ -4920,8 +5109,8 @@
         </p:nvSpPr>
         <p:spPr>
           <a:xfrm>
-            <a:off x="7302500" y="4489450"/>
-            <a:ext cx="1270000" cy="190500"/>
+            <a:off x="7302500" y="4470717"/>
+            <a:ext cx="1270000" cy="227965"/>
           </a:xfrm>
           <a:prstGeom prst="rect">
             <a:avLst/>
@@ -4938,14 +5127,21 @@
               <a:lnSpc>
                 <a:spcPct val="112000"/>
               </a:lnSpc>
+              <a:spcBef>
+                <a:spcPts val="0"/>
+              </a:spcBef>
+              <a:spcAft>
+                <a:spcPts val="0"/>
+              </a:spcAft>
             </a:pPr>
             <a:r>
-              <a:rPr sz="1300" b="1" i="0">
+              <a:rPr sz="1300" b="1" i="0" lang="zh-CN" altLang="zh-CN">
                 <a:solidFill>
                   <a:srgbClr val="1F4E79"/>
                 </a:solidFill>
                 <a:latin typeface="Microsoft YaHei"/>
                 <a:ea typeface="Microsoft YaHei"/>
+                <a:cs typeface="Microsoft YaHei"/>
               </a:rPr>
               <a:t>金融风控</a:t>
             </a:r>
@@ -4960,8 +5156,8 @@
         </p:nvSpPr>
         <p:spPr>
           <a:xfrm>
-            <a:off x="7277100" y="4705350"/>
-            <a:ext cx="1320800" cy="495299"/>
+            <a:off x="7234998" y="4704524"/>
+            <a:ext cx="1405001" cy="496951"/>
           </a:xfrm>
           <a:prstGeom prst="rect">
             <a:avLst/>
@@ -4978,14 +5174,21 @@
               <a:lnSpc>
                 <a:spcPct val="112000"/>
               </a:lnSpc>
+              <a:spcBef>
+                <a:spcPts val="0"/>
+              </a:spcBef>
+              <a:spcAft>
+                <a:spcPts val="0"/>
+              </a:spcAft>
             </a:pPr>
             <a:r>
-              <a:rPr sz="950" b="0" i="0">
+              <a:rPr sz="950" b="0" i="0" lang="zh-CN" altLang="zh-CN">
                 <a:solidFill>
                   <a:srgbClr val="262626"/>
                 </a:solidFill>
                 <a:latin typeface="Microsoft YaHei"/>
                 <a:ea typeface="Microsoft YaHei"/>
+                <a:cs typeface="Microsoft YaHei"/>
               </a:rPr>
               <a:t>风控报告自动生成, 单据审核处理效率提升 9 倍</a:t>
             </a:r>
@@ -5034,7 +5237,14 @@
           <a:bodyPr rtlCol="0" anchor="ctr"/>
           <a:lstStyle/>
           <a:p>
-            <a:pPr algn="ctr"/>
+            <a:pPr algn="ctr">
+              <a:spcBef>
+                <a:spcPts val="0"/>
+              </a:spcBef>
+              <a:spcAft>
+                <a:spcPts val="0"/>
+              </a:spcAft>
+            </a:pPr>
           </a:p>
         </p:txBody>
       </p:sp>
@@ -5046,8 +5256,8 @@
         </p:nvSpPr>
         <p:spPr>
           <a:xfrm>
-            <a:off x="4114800" y="4146550"/>
-            <a:ext cx="279400" cy="279400"/>
+            <a:off x="3971925" y="4069778"/>
+            <a:ext cx="565150" cy="432943"/>
           </a:xfrm>
           <a:prstGeom prst="rect">
             <a:avLst/>
@@ -5064,14 +5274,21 @@
               <a:lnSpc>
                 <a:spcPct val="112000"/>
               </a:lnSpc>
+              <a:spcBef>
+                <a:spcPts val="0"/>
+              </a:spcBef>
+              <a:spcAft>
+                <a:spcPts val="0"/>
+              </a:spcAft>
             </a:pPr>
             <a:r>
-              <a:rPr sz="2600" b="1" i="0">
+              <a:rPr sz="2600" b="1" i="0" lang="zh-CN" altLang="zh-CN">
                 <a:solidFill>
                   <a:srgbClr val="1F4E79"/>
                 </a:solidFill>
                 <a:latin typeface="Microsoft YaHei"/>
                 <a:ea typeface="Microsoft YaHei"/>
+                <a:cs typeface="Microsoft YaHei"/>
               </a:rPr>
               <a:t>⚡</a:t>
             </a:r>
@@ -5086,8 +5303,8 @@
         </p:nvSpPr>
         <p:spPr>
           <a:xfrm>
-            <a:off x="3619500" y="4489450"/>
-            <a:ext cx="1270000" cy="190500"/>
+            <a:off x="3619500" y="4470717"/>
+            <a:ext cx="1270000" cy="227965"/>
           </a:xfrm>
           <a:prstGeom prst="rect">
             <a:avLst/>
@@ -5104,14 +5321,21 @@
               <a:lnSpc>
                 <a:spcPct val="112000"/>
               </a:lnSpc>
+              <a:spcBef>
+                <a:spcPts val="0"/>
+              </a:spcBef>
+              <a:spcAft>
+                <a:spcPts val="0"/>
+              </a:spcAft>
             </a:pPr>
             <a:r>
-              <a:rPr sz="1300" b="1" i="0">
+              <a:rPr sz="1300" b="1" i="0" lang="zh-CN" altLang="zh-CN">
                 <a:solidFill>
                   <a:srgbClr val="1F4E79"/>
                 </a:solidFill>
                 <a:latin typeface="Microsoft YaHei"/>
                 <a:ea typeface="Microsoft YaHei"/>
+                <a:cs typeface="Microsoft YaHei"/>
               </a:rPr>
               <a:t>智能制造</a:t>
             </a:r>
@@ -5144,14 +5368,21 @@
               <a:lnSpc>
                 <a:spcPct val="112000"/>
               </a:lnSpc>
+              <a:spcBef>
+                <a:spcPts val="0"/>
+              </a:spcBef>
+              <a:spcAft>
+                <a:spcPts val="0"/>
+              </a:spcAft>
             </a:pPr>
             <a:r>
-              <a:rPr sz="950" b="0" i="0">
+              <a:rPr sz="950" b="0" i="0" lang="zh-CN" altLang="zh-CN">
                 <a:solidFill>
                   <a:srgbClr val="262626"/>
                 </a:solidFill>
                 <a:latin typeface="Microsoft YaHei"/>
                 <a:ea typeface="Microsoft YaHei"/>
+                <a:cs typeface="Microsoft YaHei"/>
               </a:rPr>
               <a:t>千变量排产求解 10 分钟出最优解, 产线利用率 +15%</a:t>
             </a:r>
@@ -5200,7 +5431,14 @@
           <a:bodyPr rtlCol="0" anchor="ctr"/>
           <a:lstStyle/>
           <a:p>
-            <a:pPr algn="ctr"/>
+            <a:pPr algn="ctr">
+              <a:spcBef>
+                <a:spcPts val="0"/>
+              </a:spcBef>
+              <a:spcAft>
+                <a:spcPts val="0"/>
+              </a:spcAft>
+            </a:pPr>
           </a:p>
         </p:txBody>
       </p:sp>
@@ -5244,7 +5482,14 @@
           <a:bodyPr rtlCol="0" anchor="ctr"/>
           <a:lstStyle/>
           <a:p>
-            <a:pPr algn="ctr"/>
+            <a:pPr algn="ctr">
+              <a:spcBef>
+                <a:spcPts val="0"/>
+              </a:spcBef>
+              <a:spcAft>
+                <a:spcPts val="0"/>
+              </a:spcAft>
+            </a:pPr>
           </a:p>
         </p:txBody>
       </p:sp>
@@ -5288,7 +5533,14 @@
           <a:bodyPr rtlCol="0" anchor="ctr"/>
           <a:lstStyle/>
           <a:p>
-            <a:pPr algn="ctr"/>
+            <a:pPr algn="ctr">
+              <a:spcBef>
+                <a:spcPts val="0"/>
+              </a:spcBef>
+              <a:spcAft>
+                <a:spcPts val="0"/>
+              </a:spcAft>
+            </a:pPr>
           </a:p>
         </p:txBody>
       </p:sp>
@@ -5332,7 +5584,14 @@
           <a:bodyPr rtlCol="0" anchor="ctr"/>
           <a:lstStyle/>
           <a:p>
-            <a:pPr algn="ctr"/>
+            <a:pPr algn="ctr">
+              <a:spcBef>
+                <a:spcPts val="0"/>
+              </a:spcBef>
+              <a:spcAft>
+                <a:spcPts val="0"/>
+              </a:spcAft>
+            </a:pPr>
           </a:p>
         </p:txBody>
       </p:sp>
@@ -5452,8 +5711,8 @@
         </p:nvSpPr>
         <p:spPr>
           <a:xfrm>
-            <a:off x="1778000" y="3003550"/>
-            <a:ext cx="1270000" cy="190500"/>
+            <a:off x="1778000" y="2984817"/>
+            <a:ext cx="1270000" cy="227965"/>
           </a:xfrm>
           <a:prstGeom prst="rect">
             <a:avLst/>
@@ -5470,14 +5729,21 @@
               <a:lnSpc>
                 <a:spcPct val="112000"/>
               </a:lnSpc>
+              <a:spcBef>
+                <a:spcPts val="0"/>
+              </a:spcBef>
+              <a:spcAft>
+                <a:spcPts val="0"/>
+              </a:spcAft>
             </a:pPr>
             <a:r>
-              <a:rPr sz="1300" b="1" i="0">
+              <a:rPr sz="1300" b="1" i="0" lang="zh-CN" altLang="zh-CN">
                 <a:solidFill>
                   <a:srgbClr val="1F4E79"/>
                 </a:solidFill>
                 <a:latin typeface="Microsoft YaHei"/>
                 <a:ea typeface="Microsoft YaHei"/>
+                <a:cs typeface="Microsoft YaHei"/>
               </a:rPr>
               <a:t>铁路检测</a:t>
             </a:r>
@@ -5510,14 +5776,21 @@
               <a:lnSpc>
                 <a:spcPct val="112000"/>
               </a:lnSpc>
+              <a:spcBef>
+                <a:spcPts val="0"/>
+              </a:spcBef>
+              <a:spcAft>
+                <a:spcPts val="0"/>
+              </a:spcAft>
             </a:pPr>
             <a:r>
-              <a:rPr sz="950" b="0" i="0">
+              <a:rPr sz="950" b="0" i="0" lang="zh-CN" altLang="zh-CN">
                 <a:solidFill>
                   <a:srgbClr val="262626"/>
                 </a:solidFill>
                 <a:latin typeface="Microsoft YaHei"/>
                 <a:ea typeface="Microsoft YaHei"/>
+                <a:cs typeface="Microsoft YaHei"/>
               </a:rPr>
               <a:t>TFDS 货车故障图像识别准确率 99.8%, 替代人工看图</a:t>
             </a:r>
@@ -5532,8 +5805,8 @@
         </p:nvSpPr>
         <p:spPr>
           <a:xfrm>
-            <a:off x="5143500" y="901700"/>
-            <a:ext cx="1905000" cy="165100"/>
+            <a:off x="5143500" y="882142"/>
+            <a:ext cx="1905000" cy="204215"/>
           </a:xfrm>
           <a:prstGeom prst="rect">
             <a:avLst/>
@@ -5550,14 +5823,21 @@
               <a:lnSpc>
                 <a:spcPct val="112000"/>
               </a:lnSpc>
+              <a:spcBef>
+                <a:spcPts val="0"/>
+              </a:spcBef>
+              <a:spcAft>
+                <a:spcPts val="0"/>
+              </a:spcAft>
             </a:pPr>
             <a:r>
-              <a:rPr sz="1150" b="1" i="0">
+              <a:rPr sz="1150" b="1" i="0" lang="zh-CN" altLang="zh-CN">
                 <a:solidFill>
                   <a:srgbClr val="1F4E79"/>
                 </a:solidFill>
                 <a:latin typeface="Microsoft YaHei"/>
                 <a:ea typeface="Microsoft YaHei"/>
+                <a:cs typeface="Microsoft YaHei"/>
               </a:rPr>
               <a:t>规模复制方法论</a:t>
             </a:r>
@@ -5590,14 +5870,21 @@
               <a:lnSpc>
                 <a:spcPct val="125000"/>
               </a:lnSpc>
+              <a:spcBef>
+                <a:spcPts val="0"/>
+              </a:spcBef>
+              <a:spcAft>
+                <a:spcPts val="0"/>
+              </a:spcAft>
             </a:pPr>
             <a:r>
-              <a:rPr sz="950" b="0" i="0">
+              <a:rPr sz="950" b="0" i="0" lang="zh-CN" altLang="zh-CN">
                 <a:solidFill>
                   <a:srgbClr val="595959"/>
                 </a:solidFill>
                 <a:latin typeface="Microsoft YaHei"/>
                 <a:ea typeface="Microsoft YaHei"/>
+                <a:cs typeface="Microsoft YaHei"/>
               </a:rPr>
               <a:t>• L0: 千亿参数通用基座</a:t>
             </a:r>
@@ -5607,14 +5894,21 @@
               <a:lnSpc>
                 <a:spcPct val="125000"/>
               </a:lnSpc>
+              <a:spcBef>
+                <a:spcPts val="0"/>
+              </a:spcBef>
+              <a:spcAft>
+                <a:spcPts val="0"/>
+              </a:spcAft>
             </a:pPr>
             <a:r>
-              <a:rPr sz="950" b="0" i="0">
+              <a:rPr sz="950" b="0" i="0" lang="zh-CN" altLang="zh-CN">
                 <a:solidFill>
                   <a:srgbClr val="595959"/>
                 </a:solidFill>
                 <a:latin typeface="Microsoft YaHei"/>
                 <a:ea typeface="Microsoft YaHei"/>
+                <a:cs typeface="Microsoft YaHei"/>
               </a:rPr>
               <a:t>• L1: 行业语料增量精调</a:t>
             </a:r>
@@ -5624,14 +5918,21 @@
               <a:lnSpc>
                 <a:spcPct val="125000"/>
               </a:lnSpc>
+              <a:spcBef>
+                <a:spcPts val="0"/>
+              </a:spcBef>
+              <a:spcAft>
+                <a:spcPts val="0"/>
+              </a:spcAft>
             </a:pPr>
             <a:r>
-              <a:rPr sz="950" b="0" i="0">
+              <a:rPr sz="950" b="0" i="0" lang="zh-CN" altLang="zh-CN">
                 <a:solidFill>
                   <a:srgbClr val="595959"/>
                 </a:solidFill>
                 <a:latin typeface="Microsoft YaHei"/>
                 <a:ea typeface="Microsoft YaHei"/>
+                <a:cs typeface="Microsoft YaHei"/>
               </a:rPr>
               <a:t>• L2: 场景轻量化适配</a:t>
             </a:r>
@@ -5641,14 +5942,21 @@
               <a:lnSpc>
                 <a:spcPct val="125000"/>
               </a:lnSpc>
+              <a:spcBef>
+                <a:spcPts val="0"/>
+              </a:spcBef>
+              <a:spcAft>
+                <a:spcPts val="0"/>
+              </a:spcAft>
             </a:pPr>
             <a:r>
-              <a:rPr sz="950" b="0" i="0">
+              <a:rPr sz="950" b="0" i="0" lang="zh-CN" altLang="zh-CN">
                 <a:solidFill>
                   <a:srgbClr val="595959"/>
                 </a:solidFill>
                 <a:latin typeface="Microsoft YaHei"/>
                 <a:ea typeface="Microsoft YaHei"/>
+                <a:cs typeface="Microsoft YaHei"/>
               </a:rPr>
               <a:t>• 工具链低代码快速交付</a:t>
             </a:r>
@@ -5697,7 +6005,14 @@
           <a:bodyPr rtlCol="0" anchor="ctr"/>
           <a:lstStyle/>
           <a:p>
-            <a:pPr algn="ctr"/>
+            <a:pPr algn="ctr">
+              <a:spcBef>
+                <a:spcPts val="0"/>
+              </a:spcBef>
+              <a:spcAft>
+                <a:spcPts val="0"/>
+              </a:spcAft>
+            </a:pPr>
           </a:p>
         </p:txBody>
       </p:sp>
@@ -5727,14 +6042,21 @@
               <a:lnSpc>
                 <a:spcPct val="112000"/>
               </a:lnSpc>
+              <a:spcBef>
+                <a:spcPts val="0"/>
+              </a:spcBef>
+              <a:spcAft>
+                <a:spcPts val="0"/>
+              </a:spcAft>
             </a:pPr>
             <a:r>
-              <a:rPr sz="1000" b="1" i="0">
+              <a:rPr sz="1000" b="1" i="0" lang="zh-CN" altLang="zh-CN">
                 <a:solidFill>
                   <a:srgbClr val="1F4E79"/>
                 </a:solidFill>
                 <a:latin typeface="Microsoft YaHei"/>
                 <a:ea typeface="Microsoft YaHei"/>
+                <a:cs typeface="Microsoft YaHei"/>
               </a:rPr>
               <a:t>场景准入: 价值数据双评估</a:t>
             </a:r>
@@ -5820,7 +6142,14 @@
           <a:bodyPr rtlCol="0" anchor="ctr"/>
           <a:lstStyle/>
           <a:p>
-            <a:pPr algn="ctr"/>
+            <a:pPr algn="ctr">
+              <a:spcBef>
+                <a:spcPts val="0"/>
+              </a:spcBef>
+              <a:spcAft>
+                <a:spcPts val="0"/>
+              </a:spcAft>
+            </a:pPr>
           </a:p>
         </p:txBody>
       </p:sp>
@@ -5850,14 +6179,21 @@
               <a:lnSpc>
                 <a:spcPct val="112000"/>
               </a:lnSpc>
+              <a:spcBef>
+                <a:spcPts val="0"/>
+              </a:spcBef>
+              <a:spcAft>
+                <a:spcPts val="0"/>
+              </a:spcAft>
             </a:pPr>
             <a:r>
-              <a:rPr sz="1000" b="1" i="0">
+              <a:rPr sz="1000" b="1" i="0" lang="zh-CN" altLang="zh-CN">
                 <a:solidFill>
                   <a:srgbClr val="1F4E79"/>
                 </a:solidFill>
                 <a:latin typeface="Microsoft YaHei"/>
                 <a:ea typeface="Microsoft YaHei"/>
+                <a:cs typeface="Microsoft YaHei"/>
               </a:rPr>
               <a:t>行业精调: 语料治理增量训练</a:t>
             </a:r>
@@ -5943,7 +6279,14 @@
           <a:bodyPr rtlCol="0" anchor="ctr"/>
           <a:lstStyle/>
           <a:p>
-            <a:pPr algn="ctr"/>
+            <a:pPr algn="ctr">
+              <a:spcBef>
+                <a:spcPts val="0"/>
+              </a:spcBef>
+              <a:spcAft>
+                <a:spcPts val="0"/>
+              </a:spcAft>
+            </a:pPr>
           </a:p>
         </p:txBody>
       </p:sp>
@@ -5973,14 +6316,21 @@
               <a:lnSpc>
                 <a:spcPct val="112000"/>
               </a:lnSpc>
+              <a:spcBef>
+                <a:spcPts val="0"/>
+              </a:spcBef>
+              <a:spcAft>
+                <a:spcPts val="0"/>
+              </a:spcAft>
             </a:pPr>
             <a:r>
-              <a:rPr sz="1000" b="1" i="0">
+              <a:rPr sz="1000" b="1" i="0" lang="zh-CN" altLang="zh-CN">
                 <a:solidFill>
                   <a:srgbClr val="1F4E79"/>
                 </a:solidFill>
                 <a:latin typeface="Microsoft YaHei"/>
                 <a:ea typeface="Microsoft YaHei"/>
+                <a:cs typeface="Microsoft YaHei"/>
               </a:rPr>
               <a:t>规模复制: 模板化交付≤2周</a:t>
             </a:r>
@@ -5995,8 +6345,8 @@
         </p:nvSpPr>
         <p:spPr>
           <a:xfrm>
-            <a:off x="533400" y="4178300"/>
-            <a:ext cx="1587500" cy="165100"/>
+            <a:off x="533400" y="4158741"/>
+            <a:ext cx="1587500" cy="204215"/>
           </a:xfrm>
           <a:prstGeom prst="rect">
             <a:avLst/>
@@ -6013,14 +6363,21 @@
               <a:lnSpc>
                 <a:spcPct val="112000"/>
               </a:lnSpc>
+              <a:spcBef>
+                <a:spcPts val="0"/>
+              </a:spcBef>
+              <a:spcAft>
+                <a:spcPts val="0"/>
+              </a:spcAft>
             </a:pPr>
             <a:r>
-              <a:rPr sz="1150" b="1" i="0">
+              <a:rPr sz="1150" b="1" i="0" lang="zh-CN" altLang="zh-CN">
                 <a:solidFill>
                   <a:srgbClr val="1F4E79"/>
                 </a:solidFill>
                 <a:latin typeface="Microsoft YaHei"/>
                 <a:ea typeface="Microsoft YaHei"/>
+                <a:cs typeface="Microsoft YaHei"/>
               </a:rPr>
               <a:t>规模复制三保障</a:t>
             </a:r>
@@ -6053,14 +6410,21 @@
               <a:lnSpc>
                 <a:spcPct val="130000"/>
               </a:lnSpc>
+              <a:spcBef>
+                <a:spcPts val="0"/>
+              </a:spcBef>
+              <a:spcAft>
+                <a:spcPts val="0"/>
+              </a:spcAft>
             </a:pPr>
             <a:r>
-              <a:rPr sz="950" b="0" i="0">
+              <a:rPr sz="950" b="0" i="0" lang="zh-CN" altLang="zh-CN">
                 <a:solidFill>
                   <a:srgbClr val="595959"/>
                 </a:solidFill>
                 <a:latin typeface="Microsoft YaHei"/>
                 <a:ea typeface="Microsoft YaHei"/>
+                <a:cs typeface="Microsoft YaHei"/>
               </a:rPr>
               <a:t>规模复制由三重保障托底: 200 余人专业服务团队负责驻场交付, 行业语料经合规体系全程治理, 伙伴生态联合交付并持续沉淀场景模板资产。</a:t>
             </a:r>
@@ -6093,14 +6457,21 @@
               <a:lnSpc>
                 <a:spcPct val="112000"/>
               </a:lnSpc>
+              <a:spcBef>
+                <a:spcPts val="0"/>
+              </a:spcBef>
+              <a:spcAft>
+                <a:spcPts val="0"/>
+              </a:spcAft>
             </a:pPr>
             <a:r>
-              <a:rPr sz="1050" b="1" i="0">
+              <a:rPr sz="1050" b="1" i="0" lang="zh-CN" altLang="zh-CN">
                 <a:solidFill>
                   <a:srgbClr val="1F4E79"/>
                 </a:solidFill>
                 <a:latin typeface="Microsoft YaHei"/>
                 <a:ea typeface="Microsoft YaHei"/>
+                <a:cs typeface="Microsoft YaHei"/>
               </a:rPr>
               <a:t>复制场景数 (个)</a:t>
             </a:r>
@@ -6183,7 +6554,14 @@
           <a:bodyPr rtlCol="0" anchor="ctr"/>
           <a:lstStyle/>
           <a:p>
-            <a:pPr algn="ctr"/>
+            <a:pPr algn="ctr">
+              <a:spcBef>
+                <a:spcPts val="0"/>
+              </a:spcBef>
+              <a:spcAft>
+                <a:spcPts val="0"/>
+              </a:spcAft>
+            </a:pPr>
           </a:p>
         </p:txBody>
       </p:sp>
@@ -6195,8 +6573,8 @@
         </p:nvSpPr>
         <p:spPr>
           <a:xfrm>
-            <a:off x="10348806" y="4767072"/>
-            <a:ext cx="474133" cy="139700"/>
+            <a:off x="10348806" y="4746688"/>
+            <a:ext cx="474133" cy="180467"/>
           </a:xfrm>
           <a:prstGeom prst="rect">
             <a:avLst/>
@@ -6213,14 +6591,21 @@
               <a:lnSpc>
                 <a:spcPct val="112000"/>
               </a:lnSpc>
+              <a:spcBef>
+                <a:spcPts val="0"/>
+              </a:spcBef>
+              <a:spcAft>
+                <a:spcPts val="0"/>
+              </a:spcAft>
             </a:pPr>
             <a:r>
-              <a:rPr sz="1000" b="1" i="0">
+              <a:rPr sz="1000" b="1" i="0" lang="zh-CN" altLang="zh-CN">
                 <a:solidFill>
                   <a:srgbClr val="262626"/>
                 </a:solidFill>
                 <a:latin typeface="Microsoft YaHei"/>
                 <a:ea typeface="Microsoft YaHei"/>
+                <a:cs typeface="Microsoft YaHei"/>
               </a:rPr>
               <a:t>120</a:t>
             </a:r>
@@ -6253,14 +6638,21 @@
               <a:lnSpc>
                 <a:spcPct val="112000"/>
               </a:lnSpc>
+              <a:spcBef>
+                <a:spcPts val="0"/>
+              </a:spcBef>
+              <a:spcAft>
+                <a:spcPts val="0"/>
+              </a:spcAft>
             </a:pPr>
             <a:r>
-              <a:rPr sz="950" b="0" i="0">
+              <a:rPr sz="950" b="0" i="0" lang="zh-CN" altLang="zh-CN">
                 <a:solidFill>
                   <a:srgbClr val="595959"/>
                 </a:solidFill>
                 <a:latin typeface="Microsoft YaHei"/>
                 <a:ea typeface="Microsoft YaHei"/>
+                <a:cs typeface="Microsoft YaHei"/>
               </a:rPr>
               <a:t>2024</a:t>
             </a:r>
@@ -6307,7 +6699,14 @@
           <a:bodyPr rtlCol="0" anchor="ctr"/>
           <a:lstStyle/>
           <a:p>
-            <a:pPr algn="ctr"/>
+            <a:pPr algn="ctr">
+              <a:spcBef>
+                <a:spcPts val="0"/>
+              </a:spcBef>
+              <a:spcAft>
+                <a:spcPts val="0"/>
+              </a:spcAft>
+            </a:pPr>
           </a:p>
         </p:txBody>
       </p:sp>
@@ -6319,8 +6718,8 @@
         </p:nvSpPr>
         <p:spPr>
           <a:xfrm>
-            <a:off x="10822940" y="4550156"/>
-            <a:ext cx="474133" cy="139700"/>
+            <a:off x="10822940" y="4529772"/>
+            <a:ext cx="474133" cy="180467"/>
           </a:xfrm>
           <a:prstGeom prst="rect">
             <a:avLst/>
@@ -6337,14 +6736,21 @@
               <a:lnSpc>
                 <a:spcPct val="112000"/>
               </a:lnSpc>
+              <a:spcBef>
+                <a:spcPts val="0"/>
+              </a:spcBef>
+              <a:spcAft>
+                <a:spcPts val="0"/>
+              </a:spcAft>
             </a:pPr>
             <a:r>
-              <a:rPr sz="1000" b="1" i="0">
+              <a:rPr sz="1000" b="1" i="0" lang="zh-CN" altLang="zh-CN">
                 <a:solidFill>
                   <a:srgbClr val="262626"/>
                 </a:solidFill>
                 <a:latin typeface="Microsoft YaHei"/>
                 <a:ea typeface="Microsoft YaHei"/>
+                <a:cs typeface="Microsoft YaHei"/>
               </a:rPr>
               <a:t>260</a:t>
             </a:r>
@@ -6377,14 +6783,21 @@
               <a:lnSpc>
                 <a:spcPct val="112000"/>
               </a:lnSpc>
+              <a:spcBef>
+                <a:spcPts val="0"/>
+              </a:spcBef>
+              <a:spcAft>
+                <a:spcPts val="0"/>
+              </a:spcAft>
             </a:pPr>
             <a:r>
-              <a:rPr sz="950" b="0" i="0">
+              <a:rPr sz="950" b="0" i="0" lang="zh-CN" altLang="zh-CN">
                 <a:solidFill>
                   <a:srgbClr val="595959"/>
                 </a:solidFill>
                 <a:latin typeface="Microsoft YaHei"/>
                 <a:ea typeface="Microsoft YaHei"/>
+                <a:cs typeface="Microsoft YaHei"/>
               </a:rPr>
               <a:t>2025</a:t>
             </a:r>
@@ -6431,7 +6844,14 @@
           <a:bodyPr rtlCol="0" anchor="ctr"/>
           <a:lstStyle/>
           <a:p>
-            <a:pPr algn="ctr"/>
+            <a:pPr algn="ctr">
+              <a:spcBef>
+                <a:spcPts val="0"/>
+              </a:spcBef>
+              <a:spcAft>
+                <a:spcPts val="0"/>
+              </a:spcAft>
+            </a:pPr>
           </a:p>
         </p:txBody>
       </p:sp>
@@ -6443,8 +6863,8 @@
         </p:nvSpPr>
         <p:spPr>
           <a:xfrm>
-            <a:off x="11297073" y="4333240"/>
-            <a:ext cx="474133" cy="139700"/>
+            <a:off x="11297073" y="4312856"/>
+            <a:ext cx="474133" cy="180467"/>
           </a:xfrm>
           <a:prstGeom prst="rect">
             <a:avLst/>
@@ -6461,14 +6881,21 @@
               <a:lnSpc>
                 <a:spcPct val="112000"/>
               </a:lnSpc>
+              <a:spcBef>
+                <a:spcPts val="0"/>
+              </a:spcBef>
+              <a:spcAft>
+                <a:spcPts val="0"/>
+              </a:spcAft>
             </a:pPr>
             <a:r>
-              <a:rPr sz="1000" b="1" i="0">
+              <a:rPr sz="1000" b="1" i="0" lang="zh-CN" altLang="zh-CN">
                 <a:solidFill>
                   <a:srgbClr val="262626"/>
                 </a:solidFill>
                 <a:latin typeface="Microsoft YaHei"/>
                 <a:ea typeface="Microsoft YaHei"/>
+                <a:cs typeface="Microsoft YaHei"/>
               </a:rPr>
               <a:t>400</a:t>
             </a:r>
@@ -6501,14 +6928,21 @@
               <a:lnSpc>
                 <a:spcPct val="112000"/>
               </a:lnSpc>
+              <a:spcBef>
+                <a:spcPts val="0"/>
+              </a:spcBef>
+              <a:spcAft>
+                <a:spcPts val="0"/>
+              </a:spcAft>
             </a:pPr>
             <a:r>
-              <a:rPr sz="950" b="0" i="0">
+              <a:rPr sz="950" b="0" i="0" lang="zh-CN" altLang="zh-CN">
                 <a:solidFill>
                   <a:srgbClr val="595959"/>
                 </a:solidFill>
                 <a:latin typeface="Microsoft YaHei"/>
                 <a:ea typeface="Microsoft YaHei"/>
+                <a:cs typeface="Microsoft YaHei"/>
               </a:rPr>
               <a:t>2026</a:t>
             </a:r>
@@ -6557,7 +6991,14 @@
           <a:bodyPr rtlCol="0" anchor="ctr"/>
           <a:lstStyle/>
           <a:p>
-            <a:pPr algn="ctr"/>
+            <a:pPr algn="ctr">
+              <a:spcBef>
+                <a:spcPts val="0"/>
+              </a:spcBef>
+              <a:spcAft>
+                <a:spcPts val="0"/>
+              </a:spcAft>
+            </a:pPr>
           </a:p>
         </p:txBody>
       </p:sp>
@@ -6696,14 +7137,21 @@
               <a:lnSpc>
                 <a:spcPct val="112000"/>
               </a:lnSpc>
+              <a:spcBef>
+                <a:spcPts val="0"/>
+              </a:spcBef>
+              <a:spcAft>
+                <a:spcPts val="0"/>
+              </a:spcAft>
             </a:pPr>
             <a:r>
-              <a:rPr sz="1200" b="1" i="0">
+              <a:rPr sz="1200" b="1" i="0" lang="zh-CN" altLang="zh-CN">
                 <a:solidFill>
                   <a:srgbClr val="B90A0A"/>
                 </a:solidFill>
                 <a:latin typeface="Microsoft YaHei"/>
                 <a:ea typeface="Microsoft YaHei"/>
+                <a:cs typeface="Microsoft YaHei"/>
               </a:rPr>
               <a:t>覆盖行业 30+</a:t>
             </a:r>
@@ -6752,7 +7200,14 @@
           <a:bodyPr rtlCol="0" anchor="ctr"/>
           <a:lstStyle/>
           <a:p>
-            <a:pPr algn="ctr"/>
+            <a:pPr algn="ctr">
+              <a:spcBef>
+                <a:spcPts val="0"/>
+              </a:spcBef>
+              <a:spcAft>
+                <a:spcPts val="0"/>
+              </a:spcAft>
+            </a:pPr>
           </a:p>
         </p:txBody>
       </p:sp>
@@ -6798,7 +7253,14 @@
           <a:bodyPr rtlCol="0" anchor="ctr"/>
           <a:lstStyle/>
           <a:p>
-            <a:pPr algn="ctr"/>
+            <a:pPr algn="ctr">
+              <a:spcBef>
+                <a:spcPts val="0"/>
+              </a:spcBef>
+              <a:spcAft>
+                <a:spcPts val="0"/>
+              </a:spcAft>
+            </a:pPr>
           </a:p>
         </p:txBody>
       </p:sp>
@@ -6810,8 +7272,8 @@
         </p:nvSpPr>
         <p:spPr>
           <a:xfrm>
-            <a:off x="609600" y="1474931"/>
-            <a:ext cx="241300" cy="241300"/>
+            <a:off x="609600" y="1458040"/>
+            <a:ext cx="241300" cy="275082"/>
           </a:xfrm>
           <a:prstGeom prst="rect">
             <a:avLst/>
@@ -6828,14 +7290,21 @@
               <a:lnSpc>
                 <a:spcPct val="112000"/>
               </a:lnSpc>
+              <a:spcBef>
+                <a:spcPts val="0"/>
+              </a:spcBef>
+              <a:spcAft>
+                <a:spcPts val="0"/>
+              </a:spcAft>
             </a:pPr>
             <a:r>
-              <a:rPr sz="1600" b="1" i="0">
+              <a:rPr sz="1600" b="1" i="0" lang="zh-CN" altLang="zh-CN">
                 <a:solidFill>
                   <a:srgbClr val="B90A0A"/>
                 </a:solidFill>
                 <a:latin typeface="Microsoft YaHei"/>
                 <a:ea typeface="Microsoft YaHei"/>
+                <a:cs typeface="Microsoft YaHei"/>
               </a:rPr>
               <a:t>✓</a:t>
             </a:r>
@@ -6868,14 +7337,21 @@
               <a:lnSpc>
                 <a:spcPct val="112000"/>
               </a:lnSpc>
+              <a:spcBef>
+                <a:spcPts val="0"/>
+              </a:spcBef>
+              <a:spcAft>
+                <a:spcPts val="0"/>
+              </a:spcAft>
             </a:pPr>
             <a:r>
-              <a:rPr sz="1200" b="1" i="0">
+              <a:rPr sz="1200" b="1" i="0" lang="zh-CN" altLang="zh-CN">
                 <a:solidFill>
                   <a:srgbClr val="B90A0A"/>
                 </a:solidFill>
                 <a:latin typeface="Microsoft YaHei"/>
                 <a:ea typeface="Microsoft YaHei"/>
+                <a:cs typeface="Microsoft YaHei"/>
               </a:rPr>
               <a:t>复制场景 400+</a:t>
             </a:r>
@@ -6925,7 +7401,14 @@
           <a:bodyPr rtlCol="0" anchor="ctr"/>
           <a:lstStyle/>
           <a:p>
-            <a:pPr algn="ctr"/>
+            <a:pPr algn="ctr">
+              <a:spcBef>
+                <a:spcPts val="0"/>
+              </a:spcBef>
+              <a:spcAft>
+                <a:spcPts val="0"/>
+              </a:spcAft>
+            </a:pPr>
           </a:p>
         </p:txBody>
       </p:sp>
@@ -6955,14 +7438,21 @@
               <a:lnSpc>
                 <a:spcPct val="112000"/>
               </a:lnSpc>
+              <a:spcBef>
+                <a:spcPts val="0"/>
+              </a:spcBef>
+              <a:spcAft>
+                <a:spcPts val="0"/>
+              </a:spcAft>
             </a:pPr>
             <a:r>
-              <a:rPr sz="1300" b="1" i="0">
+              <a:rPr sz="1300" b="1" i="0" lang="zh-CN" altLang="zh-CN">
                 <a:solidFill>
                   <a:srgbClr val="B90A0A"/>
                 </a:solidFill>
                 <a:latin typeface="Microsoft YaHei"/>
                 <a:ea typeface="Microsoft YaHei"/>
+                <a:cs typeface="Microsoft YaHei"/>
               </a:rPr>
               <a:t>×N 规模复制</a:t>
             </a:r>
@@ -7011,7 +7501,14 @@
           <a:bodyPr rtlCol="0" anchor="ctr"/>
           <a:lstStyle/>
           <a:p>
-            <a:pPr algn="ctr"/>
+            <a:pPr algn="ctr">
+              <a:spcBef>
+                <a:spcPts val="0"/>
+              </a:spcBef>
+              <a:spcAft>
+                <a:spcPts val="0"/>
+              </a:spcAft>
+            </a:pPr>
           </a:p>
         </p:txBody>
       </p:sp>
@@ -7023,8 +7520,8 @@
         </p:nvSpPr>
         <p:spPr>
           <a:xfrm>
-            <a:off x="10452100" y="1525731"/>
-            <a:ext cx="241300" cy="241300"/>
+            <a:off x="10321099" y="1453595"/>
+            <a:ext cx="503301" cy="385572"/>
           </a:xfrm>
           <a:prstGeom prst="rect">
             <a:avLst/>
@@ -7041,14 +7538,21 @@
               <a:lnSpc>
                 <a:spcPct val="112000"/>
               </a:lnSpc>
+              <a:spcBef>
+                <a:spcPts val="0"/>
+              </a:spcBef>
+              <a:spcAft>
+                <a:spcPts val="0"/>
+              </a:spcAft>
             </a:pPr>
             <a:r>
-              <a:rPr sz="2300" b="1" i="0">
+              <a:rPr sz="2300" b="1" i="0" lang="zh-CN" altLang="zh-CN">
                 <a:solidFill>
                   <a:srgbClr val="B90A0A"/>
                 </a:solidFill>
                 <a:latin typeface="Microsoft YaHei"/>
                 <a:ea typeface="Microsoft YaHei"/>
+                <a:cs typeface="Microsoft YaHei"/>
               </a:rPr>
               <a:t>⚡</a:t>
             </a:r>
@@ -7081,14 +7585,21 @@
               <a:lnSpc>
                 <a:spcPct val="112000"/>
               </a:lnSpc>
+              <a:spcBef>
+                <a:spcPts val="0"/>
+              </a:spcBef>
+              <a:spcAft>
+                <a:spcPts val="0"/>
+              </a:spcAft>
             </a:pPr>
             <a:r>
-              <a:rPr sz="1200" b="1" i="0">
+              <a:rPr sz="1200" b="1" i="0" lang="zh-CN" altLang="zh-CN">
                 <a:solidFill>
                   <a:srgbClr val="B90A0A"/>
                 </a:solidFill>
                 <a:latin typeface="Microsoft YaHei"/>
                 <a:ea typeface="Microsoft YaHei"/>
+                <a:cs typeface="Microsoft YaHei"/>
               </a:rPr>
               <a:t>上线周期 -80%</a:t>
             </a:r>
@@ -7137,7 +7648,14 @@
           <a:bodyPr rtlCol="0" anchor="ctr"/>
           <a:lstStyle/>
           <a:p>
-            <a:pPr algn="ctr"/>
+            <a:pPr algn="ctr">
+              <a:spcBef>
+                <a:spcPts val="0"/>
+              </a:spcBef>
+              <a:spcAft>
+                <a:spcPts val="0"/>
+              </a:spcAft>
+            </a:pPr>
           </a:p>
         </p:txBody>
       </p:sp>
@@ -7183,7 +7701,14 @@
           <a:bodyPr rtlCol="0" anchor="ctr"/>
           <a:lstStyle/>
           <a:p>
-            <a:pPr algn="ctr"/>
+            <a:pPr algn="ctr">
+              <a:spcBef>
+                <a:spcPts val="0"/>
+              </a:spcBef>
+              <a:spcAft>
+                <a:spcPts val="0"/>
+              </a:spcAft>
+            </a:pPr>
           </a:p>
         </p:txBody>
       </p:sp>
@@ -7229,7 +7754,14 @@
           <a:bodyPr rtlCol="0" anchor="ctr"/>
           <a:lstStyle/>
           <a:p>
-            <a:pPr algn="ctr"/>
+            <a:pPr algn="ctr">
+              <a:spcBef>
+                <a:spcPts val="0"/>
+              </a:spcBef>
+              <a:spcAft>
+                <a:spcPts val="0"/>
+              </a:spcAft>
+            </a:pPr>
           </a:p>
         </p:txBody>
       </p:sp>
@@ -7275,7 +7807,14 @@
           <a:bodyPr rtlCol="0" anchor="ctr"/>
           <a:lstStyle/>
           <a:p>
-            <a:pPr algn="ctr"/>
+            <a:pPr algn="ctr">
+              <a:spcBef>
+                <a:spcPts val="0"/>
+              </a:spcBef>
+              <a:spcAft>
+                <a:spcPts val="0"/>
+              </a:spcAft>
+            </a:pPr>
           </a:p>
         </p:txBody>
       </p:sp>
@@ -7305,14 +7844,21 @@
               <a:lnSpc>
                 <a:spcPct val="112000"/>
               </a:lnSpc>
+              <a:spcBef>
+                <a:spcPts val="0"/>
+              </a:spcBef>
+              <a:spcAft>
+                <a:spcPts val="0"/>
+              </a:spcAft>
             </a:pPr>
             <a:r>
-              <a:rPr sz="1200" b="1" i="0">
+              <a:rPr sz="1200" b="1" i="0" lang="zh-CN" altLang="zh-CN">
                 <a:solidFill>
                   <a:srgbClr val="B90A0A"/>
                 </a:solidFill>
                 <a:latin typeface="Microsoft YaHei"/>
                 <a:ea typeface="Microsoft YaHei"/>
+                <a:cs typeface="Microsoft YaHei"/>
               </a:rPr>
               <a:t>精调语料 10TB+</a:t>
             </a:r>
@@ -7345,14 +7891,21 @@
               <a:lnSpc>
                 <a:spcPct val="112000"/>
               </a:lnSpc>
+              <a:spcBef>
+                <a:spcPts val="0"/>
+              </a:spcBef>
+              <a:spcAft>
+                <a:spcPts val="0"/>
+              </a:spcAft>
             </a:pPr>
             <a:r>
-              <a:rPr sz="900" b="0" i="0">
+              <a:rPr sz="900" b="0" i="0" lang="zh-CN" altLang="zh-CN">
                 <a:solidFill>
                   <a:srgbClr val="595959"/>
                 </a:solidFill>
                 <a:latin typeface="Microsoft YaHei"/>
                 <a:ea typeface="Microsoft YaHei"/>
+                <a:cs typeface="Microsoft YaHei"/>
               </a:rPr>
               <a:t>* 基于盘古 5.0, 数据截至 2026H1</a:t>
             </a:r>
@@ -7422,14 +7975,21 @@
               <a:lnSpc>
                 <a:spcPct val="112000"/>
               </a:lnSpc>
+              <a:spcBef>
+                <a:spcPts val="0"/>
+              </a:spcBef>
+              <a:spcAft>
+                <a:spcPts val="0"/>
+              </a:spcAft>
             </a:pPr>
             <a:r>
-              <a:rPr sz="900" b="0" i="0">
+              <a:rPr sz="900" b="0" i="0" lang="zh-CN" altLang="zh-CN">
                 <a:solidFill>
                   <a:srgbClr val="595959"/>
                 </a:solidFill>
                 <a:latin typeface="Microsoft YaHei"/>
                 <a:ea typeface="Microsoft YaHei"/>
+                <a:cs typeface="Microsoft YaHei"/>
               </a:rPr>
               <a:t>能力辐射</a:t>
             </a:r>
@@ -7476,7 +8036,14 @@
           <a:bodyPr rtlCol="0" anchor="ctr"/>
           <a:lstStyle/>
           <a:p>
-            <a:pPr algn="ctr"/>
+            <a:pPr algn="ctr">
+              <a:spcBef>
+                <a:spcPts val="0"/>
+              </a:spcBef>
+              <a:spcAft>
+                <a:spcPts val="0"/>
+              </a:spcAft>
+            </a:pPr>
           </a:p>
         </p:txBody>
       </p:sp>
@@ -7520,7 +8087,14 @@
           <a:bodyPr rtlCol="0" anchor="ctr"/>
           <a:lstStyle/>
           <a:p>
-            <a:pPr algn="ctr"/>
+            <a:pPr algn="ctr">
+              <a:spcBef>
+                <a:spcPts val="0"/>
+              </a:spcBef>
+              <a:spcAft>
+                <a:spcPts val="0"/>
+              </a:spcAft>
+            </a:pPr>
           </a:p>
         </p:txBody>
       </p:sp>
@@ -7550,14 +8124,21 @@
               <a:lnSpc>
                 <a:spcPct val="112000"/>
               </a:lnSpc>
+              <a:spcBef>
+                <a:spcPts val="0"/>
+              </a:spcBef>
+              <a:spcAft>
+                <a:spcPts val="0"/>
+              </a:spcAft>
             </a:pPr>
             <a:r>
-              <a:rPr sz="1450" b="1" i="0">
+              <a:rPr sz="1450" b="1" i="0" lang="zh-CN" altLang="zh-CN">
                 <a:solidFill>
                   <a:srgbClr val="1F4E79"/>
                 </a:solidFill>
                 <a:latin typeface="Microsoft YaHei"/>
                 <a:ea typeface="Microsoft YaHei"/>
+                <a:cs typeface="Microsoft YaHei"/>
               </a:rPr>
               <a:t>一个基座模型 × 行业语料精调 → N 场景规模复制, 单场景定制成本下降 90%</a:t>
             </a:r>
@@ -7604,7 +8185,14 @@
           <a:bodyPr rtlCol="0" anchor="ctr"/>
           <a:lstStyle/>
           <a:p>
-            <a:pPr algn="ctr"/>
+            <a:pPr algn="ctr">
+              <a:spcBef>
+                <a:spcPts val="0"/>
+              </a:spcBef>
+              <a:spcAft>
+                <a:spcPts val="0"/>
+              </a:spcAft>
+            </a:pPr>
           </a:p>
         </p:txBody>
       </p:sp>
@@ -7634,14 +8222,21 @@
               <a:lnSpc>
                 <a:spcPct val="112000"/>
               </a:lnSpc>
+              <a:spcBef>
+                <a:spcPts val="0"/>
+              </a:spcBef>
+              <a:spcAft>
+                <a:spcPts val="0"/>
+              </a:spcAft>
             </a:pPr>
             <a:r>
-              <a:rPr sz="1400" b="1" i="0">
+              <a:rPr sz="1400" b="1" i="0" lang="zh-CN" altLang="zh-CN">
                 <a:solidFill>
                   <a:srgbClr val="262626"/>
                 </a:solidFill>
                 <a:latin typeface="Microsoft YaHei"/>
                 <a:ea typeface="Microsoft YaHei"/>
+                <a:cs typeface="Microsoft YaHei"/>
               </a:rPr>
               <a:t>单场景定制成本 -90%</a:t>
             </a:r>
